--- a/results/figures/main/compiled/pptx_compiling/fig4.pptx
+++ b/results/figures/main/compiled/pptx_compiling/fig4.pptx
@@ -197,7 +197,7 @@
           <a:p>
             <a:fld id="{8A03D9B9-C0D6-4566-99D9-8A9F8D4A1D9F}" type="datetimeFigureOut">
               <a:rPr lang="en-US" smtClean="0"/>
-              <a:t>11/12/2025</a:t>
+              <a:t>2/2/2026</a:t>
             </a:fld>
             <a:endParaRPr lang="en-US"/>
           </a:p>
@@ -595,7 +595,7 @@
           <a:p>
             <a:fld id="{38607403-B58E-C042-A785-6DBE1C5BCC35}" type="datetimeFigureOut">
               <a:rPr lang="en-US" smtClean="0"/>
-              <a:t>11/12/2025</a:t>
+              <a:t>2/2/2026</a:t>
             </a:fld>
             <a:endParaRPr lang="en-US"/>
           </a:p>
@@ -765,7 +765,7 @@
           <a:p>
             <a:fld id="{38607403-B58E-C042-A785-6DBE1C5BCC35}" type="datetimeFigureOut">
               <a:rPr lang="en-US" smtClean="0"/>
-              <a:t>11/12/2025</a:t>
+              <a:t>2/2/2026</a:t>
             </a:fld>
             <a:endParaRPr lang="en-US"/>
           </a:p>
@@ -945,7 +945,7 @@
           <a:p>
             <a:fld id="{38607403-B58E-C042-A785-6DBE1C5BCC35}" type="datetimeFigureOut">
               <a:rPr lang="en-US" smtClean="0"/>
-              <a:t>11/12/2025</a:t>
+              <a:t>2/2/2026</a:t>
             </a:fld>
             <a:endParaRPr lang="en-US"/>
           </a:p>
@@ -1115,7 +1115,7 @@
           <a:p>
             <a:fld id="{38607403-B58E-C042-A785-6DBE1C5BCC35}" type="datetimeFigureOut">
               <a:rPr lang="en-US" smtClean="0"/>
-              <a:t>11/12/2025</a:t>
+              <a:t>2/2/2026</a:t>
             </a:fld>
             <a:endParaRPr lang="en-US"/>
           </a:p>
@@ -1361,7 +1361,7 @@
           <a:p>
             <a:fld id="{38607403-B58E-C042-A785-6DBE1C5BCC35}" type="datetimeFigureOut">
               <a:rPr lang="en-US" smtClean="0"/>
-              <a:t>11/12/2025</a:t>
+              <a:t>2/2/2026</a:t>
             </a:fld>
             <a:endParaRPr lang="en-US"/>
           </a:p>
@@ -1593,7 +1593,7 @@
           <a:p>
             <a:fld id="{38607403-B58E-C042-A785-6DBE1C5BCC35}" type="datetimeFigureOut">
               <a:rPr lang="en-US" smtClean="0"/>
-              <a:t>11/12/2025</a:t>
+              <a:t>2/2/2026</a:t>
             </a:fld>
             <a:endParaRPr lang="en-US"/>
           </a:p>
@@ -1960,7 +1960,7 @@
           <a:p>
             <a:fld id="{38607403-B58E-C042-A785-6DBE1C5BCC35}" type="datetimeFigureOut">
               <a:rPr lang="en-US" smtClean="0"/>
-              <a:t>11/12/2025</a:t>
+              <a:t>2/2/2026</a:t>
             </a:fld>
             <a:endParaRPr lang="en-US"/>
           </a:p>
@@ -2078,7 +2078,7 @@
           <a:p>
             <a:fld id="{38607403-B58E-C042-A785-6DBE1C5BCC35}" type="datetimeFigureOut">
               <a:rPr lang="en-US" smtClean="0"/>
-              <a:t>11/12/2025</a:t>
+              <a:t>2/2/2026</a:t>
             </a:fld>
             <a:endParaRPr lang="en-US"/>
           </a:p>
@@ -2173,7 +2173,7 @@
           <a:p>
             <a:fld id="{38607403-B58E-C042-A785-6DBE1C5BCC35}" type="datetimeFigureOut">
               <a:rPr lang="en-US" smtClean="0"/>
-              <a:t>11/12/2025</a:t>
+              <a:t>2/2/2026</a:t>
             </a:fld>
             <a:endParaRPr lang="en-US"/>
           </a:p>
@@ -2450,7 +2450,7 @@
           <a:p>
             <a:fld id="{38607403-B58E-C042-A785-6DBE1C5BCC35}" type="datetimeFigureOut">
               <a:rPr lang="en-US" smtClean="0"/>
-              <a:t>11/12/2025</a:t>
+              <a:t>2/2/2026</a:t>
             </a:fld>
             <a:endParaRPr lang="en-US"/>
           </a:p>
@@ -2707,7 +2707,7 @@
           <a:p>
             <a:fld id="{38607403-B58E-C042-A785-6DBE1C5BCC35}" type="datetimeFigureOut">
               <a:rPr lang="en-US" smtClean="0"/>
-              <a:t>11/12/2025</a:t>
+              <a:t>2/2/2026</a:t>
             </a:fld>
             <a:endParaRPr lang="en-US"/>
           </a:p>
@@ -2920,7 +2920,7 @@
           <a:p>
             <a:fld id="{38607403-B58E-C042-A785-6DBE1C5BCC35}" type="datetimeFigureOut">
               <a:rPr lang="en-US" smtClean="0"/>
-              <a:t>11/12/2025</a:t>
+              <a:t>2/2/2026</a:t>
             </a:fld>
             <a:endParaRPr lang="en-US"/>
           </a:p>
